--- a/Introduccion a la Ingenieria/Clases/Clase 12 - Presentacion de avances de proyectos/Presentacion.pptx
+++ b/Introduccion a la Ingenieria/Clases/Clase 12 - Presentacion de avances de proyectos/Presentacion.pptx
@@ -5704,7 +5704,7 @@
               </a:spcAft>
             </a:pPr>
             <a:r>
-              <a:rPr sz="1600" b="0" i="0">
+              <a:rPr sz="2000" b="0" i="0">
                 <a:solidFill>
                   <a:srgbClr val="333333"/>
                 </a:solidFill>
@@ -5713,7 +5713,7 @@
               <a:t>–   </a:t>
             </a:r>
             <a:r>
-              <a:rPr sz="1600" b="1" i="0">
+              <a:rPr sz="2000" b="1" i="0">
                 <a:solidFill>
                   <a:srgbClr val="333333"/>
                 </a:solidFill>
@@ -5722,7 +5722,7 @@
               <a:t>Trabajo dirigido:</a:t>
             </a:r>
             <a:r>
-              <a:rPr sz="1600" b="0" i="0">
+              <a:rPr sz="2000" b="0" i="0">
                 <a:solidFill>
                   <a:srgbClr val="333333"/>
                 </a:solidFill>
@@ -5738,7 +5738,7 @@
               </a:spcAft>
             </a:pPr>
             <a:r>
-              <a:rPr sz="1600" b="0" i="0">
+              <a:rPr sz="2000" b="0" i="0">
                 <a:solidFill>
                   <a:srgbClr val="333333"/>
                 </a:solidFill>
@@ -5747,7 +5747,7 @@
               <a:t>–   </a:t>
             </a:r>
             <a:r>
-              <a:rPr sz="1600" b="1" i="0">
+              <a:rPr sz="2000" b="1" i="0">
                 <a:solidFill>
                   <a:srgbClr val="333333"/>
                 </a:solidFill>
@@ -5756,7 +5756,7 @@
               <a:t>Trabajo independiente:</a:t>
             </a:r>
             <a:r>
-              <a:rPr sz="1600" b="0" i="0">
+              <a:rPr sz="2000" b="0" i="0">
                 <a:solidFill>
                   <a:srgbClr val="333333"/>
                 </a:solidFill>
@@ -5765,7 +5765,7 @@
               <a:t> Revisión entre pares: leer el documento de </a:t>
             </a:r>
             <a:r>
-              <a:rPr sz="1600" b="1" i="0">
+              <a:rPr sz="2000" b="1" i="0">
                 <a:solidFill>
                   <a:srgbClr val="333333"/>
                 </a:solidFill>
@@ -5774,7 +5774,7 @@
               <a:t>otro equipo</a:t>
             </a:r>
             <a:r>
-              <a:rPr sz="1600" b="0" i="0">
+              <a:rPr sz="2000" b="0" i="0">
                 <a:solidFill>
                   <a:srgbClr val="333333"/>
                 </a:solidFill>
@@ -5783,7 +5783,7 @@
               <a:t> (el docente asigna la pareja) y dejarle </a:t>
             </a:r>
             <a:r>
-              <a:rPr sz="1600" b="1" i="0">
+              <a:rPr sz="2000" b="1" i="0">
                 <a:solidFill>
                   <a:srgbClr val="333333"/>
                 </a:solidFill>
@@ -5792,7 +5792,7 @@
               <a:t>dos observaciones escritas</a:t>
             </a:r>
             <a:r>
-              <a:rPr sz="1600" b="0" i="0">
+              <a:rPr sz="2000" b="0" i="0">
                 <a:solidFill>
                   <a:srgbClr val="333333"/>
                 </a:solidFill>
@@ -5808,7 +5808,7 @@
               </a:spcAft>
             </a:pPr>
             <a:r>
-              <a:rPr sz="1600" b="0" i="0">
+              <a:rPr sz="2000" b="0" i="0">
                 <a:solidFill>
                   <a:srgbClr val="333333"/>
                 </a:solidFill>
@@ -5817,7 +5817,7 @@
               <a:t>–   </a:t>
             </a:r>
             <a:r>
-              <a:rPr sz="1600" b="1" i="0">
+              <a:rPr sz="2000" b="1" i="0">
                 <a:solidFill>
                   <a:srgbClr val="333333"/>
                 </a:solidFill>
@@ -5826,7 +5826,7 @@
               <a:t>Sesión 13 · Evaluación de impacto social y ambiental</a:t>
             </a:r>
             <a:r>
-              <a:rPr sz="1600" b="0" i="0">
+              <a:rPr sz="2000" b="0" i="0">
                 <a:solidFill>
                   <a:srgbClr val="333333"/>
                 </a:solidFill>
@@ -5835,7 +5835,7 @@
               <a:t> — vemos el </a:t>
             </a:r>
             <a:r>
-              <a:rPr sz="1600" b="1" i="0">
+              <a:rPr sz="2000" b="1" i="0">
                 <a:solidFill>
                   <a:srgbClr val="333333"/>
                 </a:solidFill>
@@ -5844,7 +5844,7 @@
               <a:t>impacto social y ambiental</a:t>
             </a:r>
             <a:r>
-              <a:rPr sz="1600" b="0" i="0">
+              <a:rPr sz="2000" b="0" i="0">
                 <a:solidFill>
                   <a:srgbClr val="333333"/>
                 </a:solidFill>
@@ -5860,7 +5860,7 @@
               </a:spcAft>
             </a:pPr>
             <a:r>
-              <a:rPr sz="1600" b="0" i="0">
+              <a:rPr sz="2000" b="0" i="0">
                 <a:solidFill>
                   <a:srgbClr val="333333"/>
                 </a:solidFill>
@@ -5869,7 +5869,7 @@
               <a:t>–   </a:t>
             </a:r>
             <a:r>
-              <a:rPr sz="1600" b="1" i="0">
+              <a:rPr sz="2000" b="1" i="0">
                 <a:solidFill>
                   <a:srgbClr val="333333"/>
                 </a:solidFill>
@@ -5878,7 +5878,7 @@
               <a:t>Aviso:</a:t>
             </a:r>
             <a:r>
-              <a:rPr sz="1600" b="0" i="0">
+              <a:rPr sz="2000" b="0" i="0">
                 <a:solidFill>
                   <a:srgbClr val="333333"/>
                 </a:solidFill>
@@ -5887,7 +5887,7 @@
               <a:t> Traigan a la sesión 13 el </a:t>
             </a:r>
             <a:r>
-              <a:rPr sz="1600" b="1" i="0">
+              <a:rPr sz="2000" b="1" i="0">
                 <a:solidFill>
                   <a:srgbClr val="333333"/>
                 </a:solidFill>
@@ -5896,7 +5896,7 @@
               <a:t>listado de actores no usuarios de la sesión 3</a:t>
             </a:r>
             <a:r>
-              <a:rPr sz="1600" b="0" i="0">
+              <a:rPr sz="2000" b="0" i="0">
                 <a:solidFill>
                   <a:srgbClr val="333333"/>
                 </a:solidFill>
@@ -5905,7 +5905,7 @@
               <a:t> y el </a:t>
             </a:r>
             <a:r>
-              <a:rPr sz="1600" b="1" i="0">
+              <a:rPr sz="2000" b="1" i="0">
                 <a:solidFill>
                   <a:srgbClr val="333333"/>
                 </a:solidFill>
@@ -5914,7 +5914,7 @@
               <a:t>indicador ambiental de la sesión 5</a:t>
             </a:r>
             <a:r>
-              <a:rPr sz="1600" b="0" i="0">
+              <a:rPr sz="2000" b="0" i="0">
                 <a:solidFill>
                   <a:srgbClr val="333333"/>
                 </a:solidFill>
@@ -5930,7 +5930,7 @@
               </a:spcAft>
             </a:pPr>
             <a:r>
-              <a:rPr sz="1600" b="0" i="0">
+              <a:rPr sz="2000" b="0" i="0">
                 <a:solidFill>
                   <a:srgbClr val="333333"/>
                 </a:solidFill>
@@ -5939,7 +5939,7 @@
               <a:t>–   </a:t>
             </a:r>
             <a:r>
-              <a:rPr sz="1600" b="1" i="0">
+              <a:rPr sz="2000" b="1" i="0">
                 <a:solidFill>
                   <a:srgbClr val="333333"/>
                 </a:solidFill>
@@ -5948,7 +5948,7 @@
               <a:t>Antes de salir:</a:t>
             </a:r>
             <a:r>
-              <a:rPr sz="1600" b="0" i="0">
+              <a:rPr sz="2000" b="0" i="0">
                 <a:solidFill>
                   <a:srgbClr val="333333"/>
                 </a:solidFill>
@@ -6522,7 +6522,7 @@
         <p:spPr>
           <a:xfrm>
             <a:off x="502920" y="2798064"/>
-            <a:ext cx="2164019" cy="2560320"/>
+            <a:ext cx="2164019" cy="3099816"/>
           </a:xfrm>
           <a:prstGeom prst="rect">
             <a:avLst/>
@@ -6637,7 +6637,7 @@
         <p:spPr>
           <a:xfrm>
             <a:off x="2758379" y="2798064"/>
-            <a:ext cx="2164019" cy="2560320"/>
+            <a:ext cx="2164019" cy="3099816"/>
           </a:xfrm>
           <a:prstGeom prst="rect">
             <a:avLst/>
@@ -6752,7 +6752,7 @@
         <p:spPr>
           <a:xfrm>
             <a:off x="5013838" y="2798064"/>
-            <a:ext cx="2164019" cy="2560320"/>
+            <a:ext cx="2164019" cy="3099816"/>
           </a:xfrm>
           <a:prstGeom prst="rect">
             <a:avLst/>
@@ -6867,7 +6867,7 @@
         <p:spPr>
           <a:xfrm>
             <a:off x="7269297" y="2798064"/>
-            <a:ext cx="2164019" cy="2560320"/>
+            <a:ext cx="2164019" cy="3099816"/>
           </a:xfrm>
           <a:prstGeom prst="rect">
             <a:avLst/>
@@ -6982,7 +6982,7 @@
         <p:spPr>
           <a:xfrm>
             <a:off x="9524756" y="2798064"/>
-            <a:ext cx="2164019" cy="2560320"/>
+            <a:ext cx="2164019" cy="3099816"/>
           </a:xfrm>
           <a:prstGeom prst="rect">
             <a:avLst/>
@@ -7016,8 +7016,8 @@
         </p:nvSpPr>
         <p:spPr>
           <a:xfrm>
-            <a:off x="457200" y="5943600"/>
-            <a:ext cx="11277295" cy="365760"/>
+            <a:off x="457200" y="5806440"/>
+            <a:ext cx="11277295" cy="640080"/>
           </a:xfrm>
           <a:prstGeom prst="rect">
             <a:avLst/>
@@ -7032,7 +7032,7 @@
           <a:p>
             <a:pPr algn="ctr"/>
             <a:r>
-              <a:rPr sz="1200" b="1" i="1">
+              <a:rPr sz="1100" b="1" i="1">
                 <a:solidFill>
                   <a:srgbClr val="666666"/>
                 </a:solidFill>
@@ -7041,7 +7041,7 @@
               <a:t>Sesión distinta a las anteriores.</a:t>
             </a:r>
             <a:r>
-              <a:rPr sz="1200" b="0" i="1">
+              <a:rPr sz="1100" b="0" i="1">
                 <a:solidFill>
                   <a:srgbClr val="666666"/>
                 </a:solidFill>
@@ -7050,7 +7050,7 @@
               <a:t> El bloque de exposiciones sube a 40 minutos: cada equipo tiene </a:t>
             </a:r>
             <a:r>
-              <a:rPr sz="1200" b="1" i="1">
+              <a:rPr sz="1100" b="1" i="1">
                 <a:solidFill>
                   <a:srgbClr val="666666"/>
                 </a:solidFill>
@@ -7059,7 +7059,7 @@
               <a:t>5 minutos de avance y 3 minutos de retroalimentación del curso</a:t>
             </a:r>
             <a:r>
-              <a:rPr sz="1200" b="0" i="1">
+              <a:rPr sz="1100" b="0" i="1">
                 <a:solidFill>
                   <a:srgbClr val="666666"/>
                 </a:solidFill>
@@ -7068,7 +7068,7 @@
               <a:t>. La actividad en equipos baja a 12 minutos porque el trabajo grueso —probar el prototipo con una persona ajena— </a:t>
             </a:r>
             <a:r>
-              <a:rPr sz="1200" b="1" i="1">
+              <a:rPr sz="1100" b="1" i="1">
                 <a:solidFill>
                   <a:srgbClr val="666666"/>
                 </a:solidFill>
@@ -7077,7 +7077,7 @@
               <a:t>ya venía hecho de la sesión 11</a:t>
             </a:r>
             <a:r>
-              <a:rPr sz="1200" b="0" i="1">
+              <a:rPr sz="1100" b="0" i="1">
                 <a:solidFill>
                   <a:srgbClr val="666666"/>
                 </a:solidFill>
@@ -7297,7 +7297,7 @@
               </a:spcAft>
             </a:pPr>
             <a:r>
-              <a:rPr sz="1600" b="0" i="0">
+              <a:rPr sz="2000" b="0" i="0">
                 <a:solidFill>
                   <a:srgbClr val="333333"/>
                 </a:solidFill>
@@ -7306,7 +7306,7 @@
               <a:t>–   Separar </a:t>
             </a:r>
             <a:r>
-              <a:rPr sz="1600" b="1" i="0">
+              <a:rPr sz="2000" b="1" i="0">
                 <a:solidFill>
                   <a:srgbClr val="333333"/>
                 </a:solidFill>
@@ -7315,7 +7315,7 @@
               <a:t>lo que la persona hizo</a:t>
             </a:r>
             <a:r>
-              <a:rPr sz="1600" b="0" i="0">
+              <a:rPr sz="2000" b="0" i="0">
                 <a:solidFill>
                   <a:srgbClr val="333333"/>
                 </a:solidFill>
@@ -7324,7 +7324,7 @@
               <a:t> de lo que la persona </a:t>
             </a:r>
             <a:r>
-              <a:rPr sz="1600" b="1" i="0">
+              <a:rPr sz="2000" b="1" i="0">
                 <a:solidFill>
                   <a:srgbClr val="333333"/>
                 </a:solidFill>
@@ -7333,7 +7333,7 @@
               <a:t>dijo</a:t>
             </a:r>
             <a:r>
-              <a:rPr sz="1600" b="0" i="0">
+              <a:rPr sz="2000" b="0" i="0">
                 <a:solidFill>
                   <a:srgbClr val="333333"/>
                 </a:solidFill>
@@ -7349,7 +7349,7 @@
               </a:spcAft>
             </a:pPr>
             <a:r>
-              <a:rPr sz="1600" b="0" i="0">
+              <a:rPr sz="2000" b="0" i="0">
                 <a:solidFill>
                   <a:srgbClr val="333333"/>
                 </a:solidFill>
@@ -7358,7 +7358,7 @@
               <a:t>–   Clasificar cada tropiezo por </a:t>
             </a:r>
             <a:r>
-              <a:rPr sz="1600" b="1" i="0">
+              <a:rPr sz="2000" b="1" i="0">
                 <a:solidFill>
                   <a:srgbClr val="333333"/>
                 </a:solidFill>
@@ -7367,7 +7367,7 @@
               <a:t>tipo y gravedad</a:t>
             </a:r>
             <a:r>
-              <a:rPr sz="1600" b="0" i="0">
+              <a:rPr sz="2000" b="0" i="0">
                 <a:solidFill>
                   <a:srgbClr val="333333"/>
                 </a:solidFill>
@@ -7376,7 +7376,7 @@
               <a:t>, y encontrar el </a:t>
             </a:r>
             <a:r>
-              <a:rPr sz="1600" b="1" i="0">
+              <a:rPr sz="2000" b="1" i="0">
                 <a:solidFill>
                   <a:srgbClr val="333333"/>
                 </a:solidFill>
@@ -7385,7 +7385,7 @@
               <a:t>patrón</a:t>
             </a:r>
             <a:r>
-              <a:rPr sz="1600" b="0" i="0">
+              <a:rPr sz="2000" b="0" i="0">
                 <a:solidFill>
                   <a:srgbClr val="333333"/>
                 </a:solidFill>
@@ -7401,7 +7401,7 @@
               </a:spcAft>
             </a:pPr>
             <a:r>
-              <a:rPr sz="1600" b="0" i="0">
+              <a:rPr sz="2000" b="0" i="0">
                 <a:solidFill>
                   <a:srgbClr val="333333"/>
                 </a:solidFill>
@@ -7410,7 +7410,7 @@
               <a:t>–   Presentar un avance en 5 minutos: </a:t>
             </a:r>
             <a:r>
-              <a:rPr sz="1600" b="1" i="0">
+              <a:rPr sz="2000" b="1" i="0">
                 <a:solidFill>
                   <a:srgbClr val="333333"/>
                 </a:solidFill>
@@ -7419,7 +7419,7 @@
               <a:t>el problema, lo que falló y la decisión pendiente</a:t>
             </a:r>
             <a:r>
-              <a:rPr sz="1600" b="0" i="0">
+              <a:rPr sz="2000" b="0" i="0">
                 <a:solidFill>
                   <a:srgbClr val="333333"/>
                 </a:solidFill>
@@ -7435,7 +7435,7 @@
               </a:spcAft>
             </a:pPr>
             <a:r>
-              <a:rPr sz="1600" b="0" i="0">
+              <a:rPr sz="2000" b="0" i="0">
                 <a:solidFill>
                   <a:srgbClr val="333333"/>
                 </a:solidFill>
@@ -7444,7 +7444,7 @@
               <a:t>–   Dar y recibir </a:t>
             </a:r>
             <a:r>
-              <a:rPr sz="1600" b="1" i="0">
+              <a:rPr sz="2000" b="1" i="0">
                 <a:solidFill>
                   <a:srgbClr val="333333"/>
                 </a:solidFill>
@@ -7453,7 +7453,7 @@
               <a:t>retroalimentación útil</a:t>
             </a:r>
             <a:r>
-              <a:rPr sz="1600" b="0" i="0">
+              <a:rPr sz="2000" b="0" i="0">
                 <a:solidFill>
                   <a:srgbClr val="333333"/>
                 </a:solidFill>
@@ -8117,7 +8117,7 @@
           <a:lstStyle/>
           <a:p>
             <a:r>
-              <a:rPr sz="1500" b="1" i="0">
+              <a:rPr sz="1400" b="1" i="0">
                 <a:solidFill>
                   <a:srgbClr val="095292"/>
                 </a:solidFill>
@@ -8133,7 +8133,7 @@
               </a:spcBef>
             </a:pPr>
             <a:r>
-              <a:rPr sz="1300" b="1" i="0">
+              <a:rPr sz="1200" b="1" i="0">
                 <a:solidFill>
                   <a:srgbClr val="333333"/>
                 </a:solidFill>
@@ -8142,7 +8142,7 @@
               <a:t>Lo que hizo es el dato.</a:t>
             </a:r>
             <a:r>
-              <a:rPr sz="1300" b="0" i="0">
+              <a:rPr sz="1200" b="0" i="0">
                 <a:solidFill>
                   <a:srgbClr val="333333"/>
                 </a:solidFill>
@@ -8639,7 +8639,7 @@
           <a:lstStyle/>
           <a:p>
             <a:r>
-              <a:rPr sz="1500" b="1" i="0">
+              <a:rPr sz="1400" b="1" i="0">
                 <a:solidFill>
                   <a:srgbClr val="095292"/>
                 </a:solidFill>
@@ -8655,7 +8655,7 @@
               </a:spcBef>
             </a:pPr>
             <a:r>
-              <a:rPr sz="1300" b="0" i="0">
+              <a:rPr sz="1200" b="0" i="0">
                 <a:solidFill>
                   <a:srgbClr val="333333"/>
                 </a:solidFill>
@@ -8664,7 +8664,7 @@
               <a:t>Un tropiezo de una persona puede ser casualidad. </a:t>
             </a:r>
             <a:r>
-              <a:rPr sz="1300" b="1" i="0">
+              <a:rPr sz="1200" b="1" i="0">
                 <a:solidFill>
                   <a:srgbClr val="333333"/>
                 </a:solidFill>
@@ -8673,7 +8673,7 @@
               <a:t>El mismo tropiezo en dos de tres personas es un defecto de diseño</a:t>
             </a:r>
             <a:r>
-              <a:rPr sz="1300" b="0" i="0">
+              <a:rPr sz="1200" b="0" i="0">
                 <a:solidFill>
                   <a:srgbClr val="333333"/>
                 </a:solidFill>
@@ -10916,7 +10916,7 @@
           <a:lstStyle/>
           <a:p>
             <a:r>
-              <a:rPr sz="1500" b="1" i="0">
+              <a:rPr sz="1400" b="1" i="0">
                 <a:solidFill>
                   <a:srgbClr val="095292"/>
                 </a:solidFill>
@@ -10932,7 +10932,7 @@
               </a:spcBef>
             </a:pPr>
             <a:r>
-              <a:rPr sz="1300" b="0" i="0">
+              <a:rPr sz="1200" b="0" i="0">
                 <a:solidFill>
                   <a:srgbClr val="333333"/>
                 </a:solidFill>
@@ -10941,7 +10941,7 @@
               <a:t>«Cuando mostraron la pantalla, no encontré cómo volver» dice más que «la navegación está confusa». </a:t>
             </a:r>
             <a:r>
-              <a:rPr sz="1300" b="1" i="0">
+              <a:rPr sz="1200" b="1" i="0">
                 <a:solidFill>
                   <a:srgbClr val="333333"/>
                 </a:solidFill>

--- a/Introduccion a la Ingenieria/Clases/Clase 12 - Presentacion de avances de proyectos/Presentacion.pptx
+++ b/Introduccion a la Ingenieria/Clases/Clase 12 - Presentacion de avances de proyectos/Presentacion.pptx
@@ -3652,7 +3652,7 @@
                 </a:solidFill>
                 <a:latin typeface="Calibri"/>
               </a:rPr>
-              <a:t>12 min en equipos · 12 min: hallazgos, clasificación, decisión y la pregunta al curso · ficha de avance + las dos cosas que se van a ajustar en el muro</a:t>
+              <a:t>12 min en equipos · 12 min: hallazgos, clasificación, decisión y la pregunta al curso · ficha de avance de 5 bloques, con el plan de ajustes al cerrar</a:t>
             </a:r>
           </a:p>
         </p:txBody>
@@ -4391,7 +4391,217 @@
       </p:sp>
       <p:sp>
         <p:nvSpPr>
-          <p:cNvPr id="22" name="TextBox 21"/>
+          <p:cNvPr id="22" name="Rounded Rectangle 21"/>
+          <p:cNvSpPr/>
+          <p:nvPr/>
+        </p:nvSpPr>
+        <p:spPr>
+          <a:xfrm>
+            <a:off x="457200" y="4178808"/>
+            <a:ext cx="11277295" cy="566928"/>
+          </a:xfrm>
+          <a:prstGeom prst="roundRect">
+            <a:avLst>
+              <a:gd name="adj" fmla="val 12000"/>
+            </a:avLst>
+          </a:prstGeom>
+          <a:solidFill>
+            <a:srgbClr val="F2F2F2"/>
+          </a:solidFill>
+          <a:ln>
+            <a:noFill/>
+          </a:ln>
+        </p:spPr>
+        <p:style>
+          <a:lnRef idx="1">
+            <a:schemeClr val="accent1"/>
+          </a:lnRef>
+          <a:fillRef idx="3">
+            <a:schemeClr val="accent1"/>
+          </a:fillRef>
+          <a:effectRef idx="2">
+            <a:schemeClr val="accent1"/>
+          </a:effectRef>
+          <a:fontRef idx="minor">
+            <a:schemeClr val="lt1"/>
+          </a:fontRef>
+        </p:style>
+        <p:txBody>
+          <a:bodyPr rtlCol="0" anchor="ctr"/>
+          <a:lstStyle/>
+          <a:p>
+            <a:pPr algn="ctr"/>
+          </a:p>
+        </p:txBody>
+      </p:sp>
+      <p:sp>
+        <p:nvSpPr>
+          <p:cNvPr id="23" name="Rectangle 22"/>
+          <p:cNvSpPr/>
+          <p:nvPr/>
+        </p:nvSpPr>
+        <p:spPr>
+          <a:xfrm>
+            <a:off x="640080" y="4325112"/>
+            <a:ext cx="274320" cy="274320"/>
+          </a:xfrm>
+          <a:prstGeom prst="rect">
+            <a:avLst/>
+          </a:prstGeom>
+          <a:solidFill>
+            <a:srgbClr val="FFFFFF"/>
+          </a:solidFill>
+          <a:ln>
+            <a:solidFill>
+              <a:srgbClr val="333333"/>
+            </a:solidFill>
+          </a:ln>
+        </p:spPr>
+        <p:style>
+          <a:lnRef idx="1">
+            <a:schemeClr val="accent1"/>
+          </a:lnRef>
+          <a:fillRef idx="3">
+            <a:schemeClr val="accent1"/>
+          </a:fillRef>
+          <a:effectRef idx="2">
+            <a:schemeClr val="accent1"/>
+          </a:effectRef>
+          <a:fontRef idx="minor">
+            <a:schemeClr val="lt1"/>
+          </a:fontRef>
+        </p:style>
+        <p:txBody>
+          <a:bodyPr rtlCol="0" anchor="ctr"/>
+          <a:lstStyle/>
+          <a:p>
+            <a:pPr algn="ctr"/>
+          </a:p>
+        </p:txBody>
+      </p:sp>
+      <p:sp>
+        <p:nvSpPr>
+          <p:cNvPr id="24" name="Rectangle 23"/>
+          <p:cNvSpPr/>
+          <p:nvPr/>
+        </p:nvSpPr>
+        <p:spPr>
+          <a:xfrm>
+            <a:off x="640080" y="4325112"/>
+            <a:ext cx="73152" cy="274320"/>
+          </a:xfrm>
+          <a:prstGeom prst="rect">
+            <a:avLst/>
+          </a:prstGeom>
+          <a:solidFill>
+            <a:srgbClr val="269CCB"/>
+          </a:solidFill>
+          <a:ln>
+            <a:noFill/>
+          </a:ln>
+        </p:spPr>
+        <p:style>
+          <a:lnRef idx="1">
+            <a:schemeClr val="accent1"/>
+          </a:lnRef>
+          <a:fillRef idx="3">
+            <a:schemeClr val="accent1"/>
+          </a:fillRef>
+          <a:effectRef idx="2">
+            <a:schemeClr val="accent1"/>
+          </a:effectRef>
+          <a:fontRef idx="minor">
+            <a:schemeClr val="lt1"/>
+          </a:fontRef>
+        </p:style>
+        <p:txBody>
+          <a:bodyPr rtlCol="0" anchor="ctr"/>
+          <a:lstStyle/>
+          <a:p>
+            <a:pPr algn="ctr"/>
+          </a:p>
+        </p:txBody>
+      </p:sp>
+      <p:sp>
+        <p:nvSpPr>
+          <p:cNvPr id="25" name="TextBox 24"/>
+          <p:cNvSpPr txBox="1"/>
+          <p:nvPr/>
+        </p:nvSpPr>
+        <p:spPr>
+          <a:xfrm>
+            <a:off x="1097280" y="4270248"/>
+            <a:ext cx="10362895" cy="402336"/>
+          </a:xfrm>
+          <a:prstGeom prst="rect">
+            <a:avLst/>
+          </a:prstGeom>
+          <a:noFill/>
+        </p:spPr>
+        <p:txBody>
+          <a:bodyPr wrap="square" anchor="ctr"/>
+          <a:lstStyle/>
+          <a:p>
+            <a:r>
+              <a:rPr sz="1500" b="1" i="0">
+                <a:solidFill>
+                  <a:srgbClr val="333333"/>
+                </a:solidFill>
+                <a:latin typeface="Calibri"/>
+              </a:rPr>
+              <a:t>EL PLAN DE AJUSTES</a:t>
+            </a:r>
+            <a:r>
+              <a:rPr sz="1500" b="0" i="0">
+                <a:solidFill>
+                  <a:srgbClr val="333333"/>
+                </a:solidFill>
+                <a:latin typeface="Calibri"/>
+              </a:rPr>
+              <a:t> — Las </a:t>
+            </a:r>
+            <a:r>
+              <a:rPr sz="1500" b="1" i="0">
+                <a:solidFill>
+                  <a:srgbClr val="333333"/>
+                </a:solidFill>
+                <a:latin typeface="Calibri"/>
+              </a:rPr>
+              <a:t>dos cosas</a:t>
+            </a:r>
+            <a:r>
+              <a:rPr sz="1500" b="0" i="0">
+                <a:solidFill>
+                  <a:srgbClr val="333333"/>
+                </a:solidFill>
+                <a:latin typeface="Calibri"/>
+              </a:rPr>
+              <a:t> que el equipo va a ajustar con lo que oyó en la retroalimentación, y </a:t>
+            </a:r>
+            <a:r>
+              <a:rPr sz="1500" b="1" i="0">
+                <a:solidFill>
+                  <a:srgbClr val="333333"/>
+                </a:solidFill>
+                <a:latin typeface="Calibri"/>
+              </a:rPr>
+              <a:t>qué lo motivó</a:t>
+            </a:r>
+            <a:r>
+              <a:rPr sz="1500" b="0" i="0">
+                <a:solidFill>
+                  <a:srgbClr val="333333"/>
+                </a:solidFill>
+                <a:latin typeface="Calibri"/>
+              </a:rPr>
+              <a:t>: quién lo dijo y qué dijo. Se llena en los últimos minutos de la sesión, no antes.</a:t>
+            </a:r>
+          </a:p>
+        </p:txBody>
+      </p:sp>
+      <p:sp>
+        <p:nvSpPr>
+          <p:cNvPr id="26" name="TextBox 25"/>
           <p:cNvSpPr txBox="1"/>
           <p:nvPr/>
         </p:nvSpPr>

--- a/Introduccion a la Ingenieria/Clases/Clase 12 - Presentacion de avances de proyectos/Presentacion.pptx
+++ b/Introduccion a la Ingenieria/Clases/Clase 12 - Presentacion de avances de proyectos/Presentacion.pptx
@@ -4192,7 +4192,7 @@
                 </a:solidFill>
                 <a:latin typeface="Calibri"/>
               </a:rPr>
-              <a:t> — Lo que se arregla antes de la sesión 14, y </a:t>
+              <a:t> — Lo que se arregla antes de la Clase 14, y </a:t>
             </a:r>
             <a:r>
               <a:rPr sz="1500" b="1" i="0">
@@ -5700,7 +5700,7 @@
                 </a:solidFill>
                 <a:latin typeface="Calibri"/>
               </a:rPr>
-              <a:t>Qué van a tener listo para la sesión 14.</a:t>
+              <a:t>Qué van a tener listo para la Clase 14.</a:t>
             </a:r>
           </a:p>
         </p:txBody>
@@ -5881,7 +5881,7 @@
                 </a:solidFill>
                 <a:latin typeface="Calibri"/>
               </a:rPr>
-              <a:t>Para la sesión 13</a:t>
+              <a:t>Para la Clase 13</a:t>
             </a:r>
           </a:p>
         </p:txBody>
@@ -6033,7 +6033,7 @@
                 </a:solidFill>
                 <a:latin typeface="Calibri"/>
               </a:rPr>
-              <a:t>Sesión 13 · Evaluación de impacto social y ambiental</a:t>
+              <a:t>Clase 13 · Evaluación de impacto social y ambiental</a:t>
             </a:r>
             <a:r>
               <a:rPr sz="2000" b="0" i="0">
@@ -6094,7 +6094,7 @@
                 </a:solidFill>
                 <a:latin typeface="Calibri"/>
               </a:rPr>
-              <a:t> Traigan a la sesión 13 el </a:t>
+              <a:t> Traigan a la Clase 13 el </a:t>
             </a:r>
             <a:r>
               <a:rPr sz="2000" b="1" i="0">
@@ -6103,7 +6103,7 @@
                 </a:solidFill>
                 <a:latin typeface="Calibri"/>
               </a:rPr>
-              <a:t>listado de actores no usuarios de la sesión 3</a:t>
+              <a:t>listado de actores no usuarios de la Clase 3</a:t>
             </a:r>
             <a:r>
               <a:rPr sz="2000" b="0" i="0">
@@ -6325,7 +6325,7 @@
                 </a:solidFill>
                 <a:latin typeface="Calibri"/>
               </a:rPr>
-              <a:t>Nos vemos en la sesión 13</a:t>
+              <a:t>Nos vemos en la Clase 13</a:t>
             </a:r>
           </a:p>
         </p:txBody>
@@ -9060,7 +9060,7 @@
                 </a:solidFill>
                 <a:latin typeface="Calibri"/>
               </a:rPr>
-              <a:t>No todo cabe antes de la sesión 14. Lo que se deja fuera </a:t>
+              <a:t>No todo cabe antes de la Clase 14. Lo que se deja fuera </a:t>
             </a:r>
             <a:r>
               <a:rPr sz="1300" b="1" i="0">
@@ -9732,7 +9732,7 @@
                 </a:solidFill>
                 <a:latin typeface="Calibri"/>
               </a:rPr>
-              <a:t>Los dos primeros tipos se arreglan antes de la sesión 14. Los dos últimos, a veces, se declaran en el informe final y se dejan como trabajo siguiente.</a:t>
+              <a:t>Los dos primeros tipos se arreglan antes de la Clase 14. Los dos últimos, a veces, se declaran en el informe final y se dejan como trabajo siguiente.</a:t>
             </a:r>
           </a:p>
         </p:txBody>
@@ -10582,7 +10582,7 @@
                 </a:solidFill>
                 <a:latin typeface="Calibri"/>
               </a:rPr>
-              <a:t>Esconder lo pendiente hoy es pagarlo en la sesión 15</a:t>
+              <a:t>Esconder lo pendiente hoy es pagarlo en la Clase 15</a:t>
             </a:r>
             <a:r>
               <a:rPr sz="1300" b="0" i="0">
